--- a/business-ethics/chapter-3/decks/Deck-2-Analisis-Kasus-Oil-Sands.pptx
+++ b/business-ethics/chapter-3/decks/Deck-2-Analisis-Kasus-Oil-Sands.pptx
@@ -3782,7 +3782,7 @@
         <p:spPr>
           <a:xfrm>
             <a:off x="621792" y="457200"/>
-            <a:ext cx="962863" cy="283464"/>
+            <a:ext cx="1053389" cy="283464"/>
           </a:xfrm>
           <a:prstGeom prst="roundRect">
             <a:avLst>
@@ -3809,7 +3809,7 @@
         <p:spPr>
           <a:xfrm>
             <a:off x="621792" y="457200"/>
-            <a:ext cx="962863" cy="283464"/>
+            <a:ext cx="1053389" cy="283464"/>
           </a:xfrm>
           <a:prstGeom prst="rect">
             <a:avLst/>
@@ -3833,7 +3833,7 @@
                 <a:ea typeface="Calibri" pitchFamily="34" charset="-122"/>
                 <a:cs typeface="Calibri" pitchFamily="34" charset="-120"/>
               </a:rPr>
-              <a:t>MATRIKS</a:t>
+              <a:t>SINTESIS</a:t>
             </a:r>
             <a:endParaRPr lang="en-US" sz="950" dirty="0"/>
           </a:p>
@@ -3847,7 +3847,7 @@
         </p:nvSpPr>
         <p:spPr>
           <a:xfrm>
-            <a:off x="1703527" y="457200"/>
+            <a:off x="1794053" y="457200"/>
             <a:ext cx="1777594" cy="283464"/>
           </a:xfrm>
           <a:prstGeom prst="roundRect">
@@ -3874,7 +3874,7 @@
         </p:nvSpPr>
         <p:spPr>
           <a:xfrm>
-            <a:off x="1703527" y="457200"/>
+            <a:off x="1794053" y="457200"/>
             <a:ext cx="1777594" cy="283464"/>
           </a:xfrm>
           <a:prstGeom prst="rect">
@@ -3980,7 +3980,7 @@
                 <a:ea typeface="Calibri" pitchFamily="34" charset="-122"/>
                 <a:cs typeface="Calibri" pitchFamily="34" charset="-120"/>
               </a:rPr>
-              <a:t>Sembilan Sorotan, Satu Rangkaian Fakta</a:t>
+              <a:t>Matriks Sembilan Lensa</a:t>
             </a:r>
             <a:pPr indent="0" marL="0">
               <a:lnSpc>
@@ -5534,7 +5534,7 @@
         <p:spPr>
           <a:xfrm>
             <a:off x="621792" y="457200"/>
-            <a:ext cx="1143914" cy="283464"/>
+            <a:ext cx="962863" cy="283464"/>
           </a:xfrm>
           <a:prstGeom prst="roundRect">
             <a:avLst>
@@ -5561,7 +5561,7 @@
         <p:spPr>
           <a:xfrm>
             <a:off x="621792" y="457200"/>
-            <a:ext cx="1143914" cy="283464"/>
+            <a:ext cx="962863" cy="283464"/>
           </a:xfrm>
           <a:prstGeom prst="rect">
             <a:avLst/>
@@ -5585,7 +5585,7 @@
                 <a:ea typeface="Calibri" pitchFamily="34" charset="-122"/>
                 <a:cs typeface="Calibri" pitchFamily="34" charset="-120"/>
               </a:rPr>
-              <a:t>UJI KLAIM</a:t>
+              <a:t>ARGUMEN</a:t>
             </a:r>
             <a:endParaRPr lang="en-US" sz="950" dirty="0"/>
           </a:p>
@@ -5599,7 +5599,7 @@
         </p:nvSpPr>
         <p:spPr>
           <a:xfrm>
-            <a:off x="1884578" y="457200"/>
+            <a:off x="1703527" y="457200"/>
             <a:ext cx="1687068" cy="283464"/>
           </a:xfrm>
           <a:prstGeom prst="roundRect">
@@ -5626,7 +5626,7 @@
         </p:nvSpPr>
         <p:spPr>
           <a:xfrm>
-            <a:off x="1884578" y="457200"/>
+            <a:off x="1703527" y="457200"/>
             <a:ext cx="1687068" cy="283464"/>
           </a:xfrm>
           <a:prstGeom prst="rect">
@@ -5732,7 +5732,7 @@
                 <a:ea typeface="Calibri" pitchFamily="34" charset="-122"/>
                 <a:cs typeface="Calibri" pitchFamily="34" charset="-120"/>
               </a:rPr>
-              <a:t>Kenapa Klaim Ethical Oil Tidak Bertahan</a:t>
+              <a:t>Evaluasi Klaim Ethical Oil</a:t>
             </a:r>
             <a:pPr indent="0" marL="0">
               <a:lnSpc>
@@ -6073,7 +6073,7 @@
                 <a:ea typeface="Calibri" pitchFamily="34" charset="-122"/>
                 <a:cs typeface="Calibri" pitchFamily="34" charset="-120"/>
               </a:rPr>
-              <a:t>Prosesnya Cacat Sebelum Isinya Dinilai</a:t>
+              <a:t>Cacat Prosedural Sejak Awal</a:t>
             </a:r>
             <a:endParaRPr lang="en-US" sz="1250" dirty="0"/>
           </a:p>
@@ -6621,7 +6621,7 @@
                 <a:ea typeface="Calibri" pitchFamily="34" charset="-122"/>
                 <a:cs typeface="Calibri" pitchFamily="34" charset="-120"/>
               </a:rPr>
-              <a:t>IMPLIKASI</a:t>
+              <a:t>PENERAPAN</a:t>
             </a:r>
             <a:endParaRPr lang="en-US" sz="950" dirty="0"/>
           </a:p>
@@ -6636,7 +6636,7 @@
         <p:spPr>
           <a:xfrm>
             <a:off x="1884578" y="457200"/>
-            <a:ext cx="1234440" cy="283464"/>
+            <a:ext cx="1687068" cy="283464"/>
           </a:xfrm>
           <a:prstGeom prst="roundRect">
             <a:avLst>
@@ -6663,7 +6663,7 @@
         <p:spPr>
           <a:xfrm>
             <a:off x="1884578" y="457200"/>
-            <a:ext cx="1234440" cy="283464"/>
+            <a:ext cx="1687068" cy="283464"/>
           </a:xfrm>
           <a:prstGeom prst="rect">
             <a:avLst/>
@@ -6687,7 +6687,7 @@
                 <a:ea typeface="Calibri" pitchFamily="34" charset="-122"/>
                 <a:cs typeface="Calibri" pitchFamily="34" charset="-120"/>
               </a:rPr>
-              <a:t>MANAJERIAL</a:t>
+              <a:t>PELAJARAN KASUS</a:t>
             </a:r>
             <a:endParaRPr lang="en-US" sz="950" dirty="0"/>
           </a:p>
@@ -6768,7 +6768,7 @@
                 <a:ea typeface="Calibri" pitchFamily="34" charset="-122"/>
                 <a:cs typeface="Calibri" pitchFamily="34" charset="-120"/>
               </a:rPr>
-              <a:t>Yang Dapat Dibawa Pulang Manajer</a:t>
+              <a:t>Implikasi Manajerial</a:t>
             </a:r>
             <a:pPr indent="0" marL="0">
               <a:lnSpc>
@@ -6910,7 +6910,7 @@
                 <a:ea typeface="Calibri" pitchFamily="34" charset="-122"/>
                 <a:cs typeface="Calibri" pitchFamily="34" charset="-120"/>
               </a:rPr>
-              <a:t>Pakai Lebih dari Satu Teori</a:t>
+              <a:t>Uji dengan Beberapa Teori</a:t>
             </a:r>
             <a:endParaRPr lang="en-US" sz="1350" dirty="0"/>
           </a:p>
@@ -7077,7 +7077,7 @@
                 <a:ea typeface="Calibri" pitchFamily="34" charset="-122"/>
                 <a:cs typeface="Calibri" pitchFamily="34" charset="-120"/>
               </a:rPr>
-              <a:t>Cek Siapa yang Tidak Hadir</a:t>
+              <a:t>Identifikasi Pihak Absen</a:t>
             </a:r>
             <a:endParaRPr lang="en-US" sz="1350" dirty="0"/>
           </a:p>
@@ -7244,7 +7244,7 @@
                 <a:ea typeface="Calibri" pitchFamily="34" charset="-122"/>
                 <a:cs typeface="Calibri" pitchFamily="34" charset="-120"/>
               </a:rPr>
-              <a:t>Awasi Pilihan Istilahnya</a:t>
+              <a:t>Cermati Pilihan Istilah</a:t>
             </a:r>
             <a:endParaRPr lang="en-US" sz="1350" dirty="0"/>
           </a:p>
@@ -7561,7 +7561,7 @@
         <p:spPr>
           <a:xfrm>
             <a:off x="621792" y="457200"/>
-            <a:ext cx="1234440" cy="283464"/>
+            <a:ext cx="962863" cy="283464"/>
           </a:xfrm>
           <a:prstGeom prst="roundRect">
             <a:avLst>
@@ -7588,7 +7588,7 @@
         <p:spPr>
           <a:xfrm>
             <a:off x="621792" y="457200"/>
-            <a:ext cx="1234440" cy="283464"/>
+            <a:ext cx="962863" cy="283464"/>
           </a:xfrm>
           <a:prstGeom prst="rect">
             <a:avLst/>
@@ -7612,7 +7612,7 @@
                 <a:ea typeface="Calibri" pitchFamily="34" charset="-122"/>
                 <a:cs typeface="Calibri" pitchFamily="34" charset="-120"/>
               </a:rPr>
-              <a:t>KESIMPULAN</a:t>
+              <a:t>PENUTUP</a:t>
             </a:r>
             <a:endParaRPr lang="en-US" sz="950" dirty="0"/>
           </a:p>
@@ -7626,7 +7626,7 @@
         </p:nvSpPr>
         <p:spPr>
           <a:xfrm>
-            <a:off x="1975104" y="457200"/>
+            <a:off x="1703527" y="457200"/>
             <a:ext cx="1324966" cy="283464"/>
           </a:xfrm>
           <a:prstGeom prst="roundRect">
@@ -7653,7 +7653,7 @@
         </p:nvSpPr>
         <p:spPr>
           <a:xfrm>
-            <a:off x="1975104" y="457200"/>
+            <a:off x="1703527" y="457200"/>
             <a:ext cx="1324966" cy="283464"/>
           </a:xfrm>
           <a:prstGeom prst="rect">
@@ -7759,7 +7759,7 @@
                 <a:ea typeface="Calibri" pitchFamily="34" charset="-122"/>
                 <a:cs typeface="Calibri" pitchFamily="34" charset="-120"/>
               </a:rPr>
-              <a:t>Tiga Temuan dari Analisis Ini</a:t>
+              <a:t>Simpulan Analisis</a:t>
             </a:r>
             <a:pPr indent="0" marL="0">
               <a:lnSpc>
@@ -8058,7 +8058,7 @@
                 <a:ea typeface="Calibri" pitchFamily="34" charset="-122"/>
                 <a:cs typeface="Calibri" pitchFamily="34" charset="-120"/>
               </a:rPr>
-              <a:t>Yang Gugur Adalah Klaimnya</a:t>
+              <a:t>Klaimnya yang Gugur</a:t>
             </a:r>
             <a:endParaRPr lang="en-US" sz="1250" dirty="0"/>
           </a:p>
@@ -10936,7 +10936,7 @@
                 <a:ea typeface="Calibri" pitchFamily="34" charset="-122"/>
                 <a:cs typeface="Calibri" pitchFamily="34" charset="-120"/>
               </a:rPr>
-              <a:t>Lensa Akibat</a:t>
+              <a:t>Penilaian Akibat</a:t>
             </a:r>
             <a:endParaRPr lang="en-US" sz="1400" dirty="0"/>
           </a:p>
@@ -10975,7 +10975,7 @@
                 <a:ea typeface="Calibri" pitchFamily="34" charset="-122"/>
                 <a:cs typeface="Calibri" pitchFamily="34" charset="-120"/>
               </a:rPr>
-              <a:t>Egoism dan utilitarianism membaca kasus</a:t>
+              <a:t>Egoism dan utilitarianism pada kasus</a:t>
             </a:r>
             <a:endParaRPr lang="en-US" sz="1150" dirty="0"/>
           </a:p>
@@ -11073,7 +11073,7 @@
                 <a:ea typeface="Calibri" pitchFamily="34" charset="-122"/>
                 <a:cs typeface="Calibri" pitchFamily="34" charset="-120"/>
               </a:rPr>
-              <a:t>Lensa Prinsip</a:t>
+              <a:t>Penilaian Prinsip</a:t>
             </a:r>
             <a:endParaRPr lang="en-US" sz="1400" dirty="0"/>
           </a:p>
@@ -11112,7 +11112,7 @@
                 <a:ea typeface="Calibri" pitchFamily="34" charset="-122"/>
                 <a:cs typeface="Calibri" pitchFamily="34" charset="-120"/>
               </a:rPr>
-              <a:t>Duty, rights, dan justice membaca kasus</a:t>
+              <a:t>Duty, rights, dan justice pada kasus</a:t>
             </a:r>
             <a:endParaRPr lang="en-US" sz="1150" dirty="0"/>
           </a:p>
@@ -11210,7 +11210,7 @@
                 <a:ea typeface="Calibri" pitchFamily="34" charset="-122"/>
                 <a:cs typeface="Calibri" pitchFamily="34" charset="-120"/>
               </a:rPr>
-              <a:t>Lensa Alternatif</a:t>
+              <a:t>Penilaian Konteks</a:t>
             </a:r>
             <a:endParaRPr lang="en-US" sz="1400" dirty="0"/>
           </a:p>
@@ -11484,7 +11484,7 @@
                 <a:ea typeface="Calibri" pitchFamily="34" charset="-122"/>
                 <a:cs typeface="Calibri" pitchFamily="34" charset="-120"/>
               </a:rPr>
-              <a:t>Menguji Ethical Oil</a:t>
+              <a:t>Evaluasi Klaim</a:t>
             </a:r>
             <a:endParaRPr lang="en-US" sz="1400" dirty="0"/>
           </a:p>
@@ -11621,7 +11621,7 @@
                 <a:ea typeface="Calibri" pitchFamily="34" charset="-122"/>
                 <a:cs typeface="Calibri" pitchFamily="34" charset="-120"/>
               </a:rPr>
-              <a:t>Implikasi</a:t>
+              <a:t>Implikasi Manajerial</a:t>
             </a:r>
             <a:endParaRPr lang="en-US" sz="1400" dirty="0"/>
           </a:p>
@@ -11660,7 +11660,7 @@
                 <a:ea typeface="Calibri" pitchFamily="34" charset="-122"/>
                 <a:cs typeface="Calibri" pitchFamily="34" charset="-120"/>
               </a:rPr>
-              <a:t>Pelajaran manajerial dan konteks Indonesia</a:t>
+              <a:t>Pelajaran kasus dan konteks Indonesia</a:t>
             </a:r>
             <a:endParaRPr lang="en-US" sz="1150" dirty="0"/>
           </a:p>
@@ -11747,7 +11747,7 @@
         <p:spPr>
           <a:xfrm>
             <a:off x="621792" y="457200"/>
-            <a:ext cx="1053389" cy="283464"/>
+            <a:ext cx="872338" cy="283464"/>
           </a:xfrm>
           <a:prstGeom prst="roundRect">
             <a:avLst>
@@ -11774,7 +11774,7 @@
         <p:spPr>
           <a:xfrm>
             <a:off x="621792" y="457200"/>
-            <a:ext cx="1053389" cy="283464"/>
+            <a:ext cx="872338" cy="283464"/>
           </a:xfrm>
           <a:prstGeom prst="rect">
             <a:avLst/>
@@ -11798,7 +11798,7 @@
                 <a:ea typeface="Calibri" pitchFamily="34" charset="-122"/>
                 <a:cs typeface="Calibri" pitchFamily="34" charset="-120"/>
               </a:rPr>
-              <a:t>KERANGKA</a:t>
+              <a:t>METODE</a:t>
             </a:r>
             <a:endParaRPr lang="en-US" sz="950" dirty="0"/>
           </a:p>
@@ -11812,7 +11812,7 @@
         </p:nvSpPr>
         <p:spPr>
           <a:xfrm>
-            <a:off x="1794053" y="457200"/>
+            <a:off x="1613002" y="457200"/>
             <a:ext cx="1234440" cy="283464"/>
           </a:xfrm>
           <a:prstGeom prst="roundRect">
@@ -11839,7 +11839,7 @@
         </p:nvSpPr>
         <p:spPr>
           <a:xfrm>
-            <a:off x="1794053" y="457200"/>
+            <a:off x="1613002" y="457200"/>
             <a:ext cx="1234440" cy="283464"/>
           </a:xfrm>
           <a:prstGeom prst="rect">
@@ -11945,7 +11945,7 @@
                 <a:ea typeface="Calibri" pitchFamily="34" charset="-122"/>
                 <a:cs typeface="Calibri" pitchFamily="34" charset="-120"/>
               </a:rPr>
-              <a:t>Kasus Ini Menolak Satu Jawaban</a:t>
+              <a:t>Kerangka Analisis Pluralis</a:t>
             </a:r>
             <a:pPr indent="0" marL="0">
               <a:lnSpc>
@@ -12004,7 +12004,7 @@
                 <a:ea typeface="Calibri" pitchFamily="34" charset="-122"/>
                 <a:cs typeface="Calibri" pitchFamily="34" charset="-120"/>
               </a:rPr>
-              <a:t>Karena itu kerangkanya bukan satu teori, melainkan sembilan sekaligus.</a:t>
+              <a:t>Kasus ini tidak memiliki jawaban tunggal, sehingga dibedah dengan sembilan teori.</a:t>
             </a:r>
             <a:endParaRPr lang="en-US" sz="1350" dirty="0"/>
           </a:p>
@@ -12109,7 +12109,7 @@
                 <a:ea typeface="Calibri" pitchFamily="34" charset="-122"/>
                 <a:cs typeface="Calibri" pitchFamily="34" charset="-120"/>
               </a:rPr>
-              <a:t>Pilih Satu Teori, Ambil Kesimpulan</a:t>
+              <a:t>Pendekatan Teori Tunggal</a:t>
             </a:r>
             <a:endParaRPr lang="en-US" sz="1800" dirty="0"/>
           </a:p>
@@ -12251,7 +12251,7 @@
                 <a:ea typeface="Calibri" pitchFamily="34" charset="-122"/>
                 <a:cs typeface="Calibri" pitchFamily="34" charset="-120"/>
               </a:rPr>
-              <a:t>Jalankan Sembilan Lensa Sekaligus</a:t>
+              <a:t>Pendekatan Pluralis</a:t>
             </a:r>
             <a:endParaRPr lang="en-US" sz="1800" dirty="0"/>
           </a:p>
@@ -12994,7 +12994,7 @@
         <p:spPr>
           <a:xfrm>
             <a:off x="621792" y="457200"/>
-            <a:ext cx="872338" cy="283464"/>
+            <a:ext cx="1506017" cy="283464"/>
           </a:xfrm>
           <a:prstGeom prst="roundRect">
             <a:avLst>
@@ -13021,7 +13021,7 @@
         <p:spPr>
           <a:xfrm>
             <a:off x="621792" y="457200"/>
-            <a:ext cx="872338" cy="283464"/>
+            <a:ext cx="1506017" cy="283464"/>
           </a:xfrm>
           <a:prstGeom prst="rect">
             <a:avLst/>
@@ -13045,7 +13045,7 @@
                 <a:ea typeface="Calibri" pitchFamily="34" charset="-122"/>
                 <a:cs typeface="Calibri" pitchFamily="34" charset="-120"/>
               </a:rPr>
-              <a:t>PROFIL</a:t>
+              <a:t>KONTEKS KASUS</a:t>
             </a:r>
             <a:endParaRPr lang="en-US" sz="950" dirty="0"/>
           </a:p>
@@ -13059,7 +13059,7 @@
         </p:nvSpPr>
         <p:spPr>
           <a:xfrm>
-            <a:off x="1613002" y="457200"/>
+            <a:off x="2246681" y="457200"/>
             <a:ext cx="1687068" cy="283464"/>
           </a:xfrm>
           <a:prstGeom prst="roundRect">
@@ -13086,7 +13086,7 @@
         </p:nvSpPr>
         <p:spPr>
           <a:xfrm>
-            <a:off x="1613002" y="457200"/>
+            <a:off x="2246681" y="457200"/>
             <a:ext cx="1687068" cy="283464"/>
           </a:xfrm>
           <a:prstGeom prst="rect">
@@ -13192,7 +13192,7 @@
                 <a:ea typeface="Calibri" pitchFamily="34" charset="-122"/>
                 <a:cs typeface="Calibri" pitchFamily="34" charset="-120"/>
               </a:rPr>
-              <a:t>Apa yang Sebenarnya Ditambang</a:t>
+              <a:t>Profil Industri Oil Sands</a:t>
             </a:r>
             <a:pPr indent="0" marL="0">
               <a:lnSpc>
@@ -14295,7 +14295,7 @@
         <p:spPr>
           <a:xfrm>
             <a:off x="621792" y="457200"/>
-            <a:ext cx="1234440" cy="283464"/>
+            <a:ext cx="781812" cy="283464"/>
           </a:xfrm>
           <a:prstGeom prst="roundRect">
             <a:avLst>
@@ -14322,46 +14322,46 @@
         <p:spPr>
           <a:xfrm>
             <a:off x="621792" y="457200"/>
+            <a:ext cx="781812" cy="283464"/>
+          </a:xfrm>
+          <a:prstGeom prst="rect">
+            <a:avLst/>
+          </a:prstGeom>
+          <a:noFill/>
+          <a:ln/>
+        </p:spPr>
+        <p:txBody>
+          <a:bodyPr wrap="square" lIns="0" tIns="0" rIns="0" bIns="0" rtlCol="0" anchor="ctr"/>
+          <a:lstStyle/>
+          <a:p>
+            <a:pPr algn="ctr" indent="0" marL="0">
+              <a:buNone/>
+            </a:pPr>
+            <a:r>
+              <a:rPr lang="en-US" sz="950" b="1" spc="110" kern="0" dirty="0">
+                <a:solidFill>
+                  <a:srgbClr val="FFFFFF"/>
+                </a:solidFill>
+                <a:latin typeface="Calibri" pitchFamily="34" charset="0"/>
+                <a:ea typeface="Calibri" pitchFamily="34" charset="-122"/>
+                <a:cs typeface="Calibri" pitchFamily="34" charset="-120"/>
+              </a:rPr>
+              <a:t>AKTOR</a:t>
+            </a:r>
+            <a:endParaRPr lang="en-US" sz="950" dirty="0"/>
+          </a:p>
+        </p:txBody>
+      </p:sp>
+      <p:sp>
+        <p:nvSpPr>
+          <p:cNvPr id="5" name="Shape 3"/>
+          <p:cNvSpPr/>
+          <p:nvPr/>
+        </p:nvSpPr>
+        <p:spPr>
+          <a:xfrm>
+            <a:off x="1522476" y="457200"/>
             <a:ext cx="1234440" cy="283464"/>
-          </a:xfrm>
-          <a:prstGeom prst="rect">
-            <a:avLst/>
-          </a:prstGeom>
-          <a:noFill/>
-          <a:ln/>
-        </p:spPr>
-        <p:txBody>
-          <a:bodyPr wrap="square" lIns="0" tIns="0" rIns="0" bIns="0" rtlCol="0" anchor="ctr"/>
-          <a:lstStyle/>
-          <a:p>
-            <a:pPr algn="ctr" indent="0" marL="0">
-              <a:buNone/>
-            </a:pPr>
-            <a:r>
-              <a:rPr lang="en-US" sz="950" b="1" spc="110" kern="0" dirty="0">
-                <a:solidFill>
-                  <a:srgbClr val="FFFFFF"/>
-                </a:solidFill>
-                <a:latin typeface="Calibri" pitchFamily="34" charset="0"/>
-                <a:ea typeface="Calibri" pitchFamily="34" charset="-122"/>
-                <a:cs typeface="Calibri" pitchFamily="34" charset="-120"/>
-              </a:rPr>
-              <a:t>PETA PIHAK</a:t>
-            </a:r>
-            <a:endParaRPr lang="en-US" sz="950" dirty="0"/>
-          </a:p>
-        </p:txBody>
-      </p:sp>
-      <p:sp>
-        <p:nvSpPr>
-          <p:cNvPr id="5" name="Shape 3"/>
-          <p:cNvSpPr/>
-          <p:nvPr/>
-        </p:nvSpPr>
-        <p:spPr>
-          <a:xfrm>
-            <a:off x="1975104" y="457200"/>
-            <a:ext cx="2592324" cy="283464"/>
           </a:xfrm>
           <a:prstGeom prst="roundRect">
             <a:avLst>
@@ -14387,8 +14387,8 @@
         </p:nvSpPr>
         <p:spPr>
           <a:xfrm>
-            <a:off x="1975104" y="457200"/>
-            <a:ext cx="2592324" cy="283464"/>
+            <a:off x="1522476" y="457200"/>
+            <a:ext cx="1234440" cy="283464"/>
           </a:xfrm>
           <a:prstGeom prst="rect">
             <a:avLst/>
@@ -14412,7 +14412,7 @@
                 <a:ea typeface="Calibri" pitchFamily="34" charset="-122"/>
                 <a:cs typeface="Calibri" pitchFamily="34" charset="-120"/>
               </a:rPr>
-              <a:t>ENAM PEMANGKU KEPENTINGAN</a:t>
+              <a:t>ENAM PIHAK</a:t>
             </a:r>
             <a:endParaRPr lang="en-US" sz="950" dirty="0"/>
           </a:p>
@@ -14493,7 +14493,7 @@
                 <a:ea typeface="Calibri" pitchFamily="34" charset="-122"/>
                 <a:cs typeface="Calibri" pitchFamily="34" charset="-120"/>
               </a:rPr>
-              <a:t>Enam Pihak, Enam Kepentingan</a:t>
+              <a:t>Peta Pemangku Kepentingan</a:t>
             </a:r>
             <a:pPr indent="0" marL="0">
               <a:lnSpc>
@@ -14552,7 +14552,7 @@
                 <a:ea typeface="Calibri" pitchFamily="34" charset="-122"/>
                 <a:cs typeface="Calibri" pitchFamily="34" charset="-120"/>
               </a:rPr>
-              <a:t>Setiap teori pada bagian berikutnya memberi bobot berbeda pada pihak-pihak ini.</a:t>
+              <a:t>Setiap teori berikutnya memberi bobot berbeda pada keenam pihak ini.</a:t>
             </a:r>
             <a:endParaRPr lang="en-US" sz="1350" dirty="0"/>
           </a:p>
@@ -15685,7 +15685,7 @@
         <p:spPr>
           <a:xfrm>
             <a:off x="621792" y="457200"/>
-            <a:ext cx="1234440" cy="283464"/>
+            <a:ext cx="781812" cy="283464"/>
           </a:xfrm>
           <a:prstGeom prst="roundRect">
             <a:avLst>
@@ -15712,7 +15712,7 @@
         <p:spPr>
           <a:xfrm>
             <a:off x="621792" y="457200"/>
-            <a:ext cx="1234440" cy="283464"/>
+            <a:ext cx="781812" cy="283464"/>
           </a:xfrm>
           <a:prstGeom prst="rect">
             <a:avLst/>
@@ -15736,7 +15736,7 @@
                 <a:ea typeface="Calibri" pitchFamily="34" charset="-122"/>
                 <a:cs typeface="Calibri" pitchFamily="34" charset="-120"/>
               </a:rPr>
-              <a:t>DUA NARASI</a:t>
+              <a:t>KASUS</a:t>
             </a:r>
             <a:endParaRPr lang="en-US" sz="950" dirty="0"/>
           </a:p>
@@ -15750,7 +15750,7 @@
         </p:nvSpPr>
         <p:spPr>
           <a:xfrm>
-            <a:off x="1975104" y="457200"/>
+            <a:off x="1522476" y="457200"/>
             <a:ext cx="1687068" cy="283464"/>
           </a:xfrm>
           <a:prstGeom prst="roundRect">
@@ -15777,7 +15777,7 @@
         </p:nvSpPr>
         <p:spPr>
           <a:xfrm>
-            <a:off x="1975104" y="457200"/>
+            <a:off x="1522476" y="457200"/>
             <a:ext cx="1687068" cy="283464"/>
           </a:xfrm>
           <a:prstGeom prst="rect">
@@ -15883,7 +15883,7 @@
                 <a:ea typeface="Calibri" pitchFamily="34" charset="-122"/>
                 <a:cs typeface="Calibri" pitchFamily="34" charset="-120"/>
               </a:rPr>
-              <a:t>Dua Narasi yang Saling Berhadapan</a:t>
+              <a:t>Dua Narasi Berlawanan</a:t>
             </a:r>
             <a:pPr indent="0" marL="0">
               <a:lnSpc>
@@ -17005,7 +17005,7 @@
         <p:spPr>
           <a:xfrm>
             <a:off x="1884578" y="457200"/>
-            <a:ext cx="1777594" cy="283464"/>
+            <a:ext cx="2411273" cy="283464"/>
           </a:xfrm>
           <a:prstGeom prst="roundRect">
             <a:avLst>
@@ -17032,7 +17032,7 @@
         <p:spPr>
           <a:xfrm>
             <a:off x="1884578" y="457200"/>
-            <a:ext cx="1777594" cy="283464"/>
+            <a:ext cx="2411273" cy="283464"/>
           </a:xfrm>
           <a:prstGeom prst="rect">
             <a:avLst/>
@@ -17056,7 +17056,7 @@
                 <a:ea typeface="Calibri" pitchFamily="34" charset="-122"/>
                 <a:cs typeface="Calibri" pitchFamily="34" charset="-120"/>
               </a:rPr>
-              <a:t>CONSEQUENTIALIST</a:t>
+              <a:t>EGOISM · UTILITARIANISM</a:t>
             </a:r>
             <a:endParaRPr lang="en-US" sz="950" dirty="0"/>
           </a:p>
@@ -17137,7 +17137,7 @@
                 <a:ea typeface="Calibri" pitchFamily="34" charset="-122"/>
                 <a:cs typeface="Calibri" pitchFamily="34" charset="-120"/>
               </a:rPr>
-              <a:t>Membaca Kasus dari Akibatnya</a:t>
+              <a:t>Penilaian Berbasis Akibat</a:t>
             </a:r>
             <a:pPr indent="0" marL="0">
               <a:lnSpc>
@@ -17991,7 +17991,7 @@
         <p:spPr>
           <a:xfrm>
             <a:off x="1884578" y="457200"/>
-            <a:ext cx="1687068" cy="283464"/>
+            <a:ext cx="2411273" cy="283464"/>
           </a:xfrm>
           <a:prstGeom prst="roundRect">
             <a:avLst>
@@ -18018,7 +18018,7 @@
         <p:spPr>
           <a:xfrm>
             <a:off x="1884578" y="457200"/>
-            <a:ext cx="1687068" cy="283464"/>
+            <a:ext cx="2411273" cy="283464"/>
           </a:xfrm>
           <a:prstGeom prst="rect">
             <a:avLst/>
@@ -18042,7 +18042,7 @@
                 <a:ea typeface="Calibri" pitchFamily="34" charset="-122"/>
                 <a:cs typeface="Calibri" pitchFamily="34" charset="-120"/>
               </a:rPr>
-              <a:t>PRINCIPLE-BASED</a:t>
+              <a:t>DUTY · RIGHTS · JUSTICE</a:t>
             </a:r>
             <a:endParaRPr lang="en-US" sz="950" dirty="0"/>
           </a:p>
@@ -18123,7 +18123,7 @@
                 <a:ea typeface="Calibri" pitchFamily="34" charset="-122"/>
                 <a:cs typeface="Calibri" pitchFamily="34" charset="-120"/>
               </a:rPr>
-              <a:t>Membaca Kasus dari Prinsipnya</a:t>
+              <a:t>Penilaian Berbasis Prinsip</a:t>
             </a:r>
             <a:pPr indent="0" marL="0">
               <a:lnSpc>
@@ -19212,7 +19212,7 @@
         <p:spPr>
           <a:xfrm>
             <a:off x="1884578" y="457200"/>
-            <a:ext cx="2230222" cy="283464"/>
+            <a:ext cx="2320747" cy="283464"/>
           </a:xfrm>
           <a:prstGeom prst="roundRect">
             <a:avLst>
@@ -19239,7 +19239,7 @@
         <p:spPr>
           <a:xfrm>
             <a:off x="1884578" y="457200"/>
-            <a:ext cx="2230222" cy="283464"/>
+            <a:ext cx="2320747" cy="283464"/>
           </a:xfrm>
           <a:prstGeom prst="rect">
             <a:avLst/>
@@ -19263,7 +19263,7 @@
                 <a:ea typeface="Calibri" pitchFamily="34" charset="-122"/>
                 <a:cs typeface="Calibri" pitchFamily="34" charset="-120"/>
               </a:rPr>
-              <a:t>PERSPEKTIF ALTERNATIF</a:t>
+              <a:t>EMPAT TEORI ALTERNATIF</a:t>
             </a:r>
             <a:endParaRPr lang="en-US" sz="950" dirty="0"/>
           </a:p>
@@ -19344,7 +19344,7 @@
                 <a:ea typeface="Calibri" pitchFamily="34" charset="-122"/>
                 <a:cs typeface="Calibri" pitchFamily="34" charset="-120"/>
               </a:rPr>
-              <a:t>Membaca Kasus dari Sisi yang Terlewat</a:t>
+              <a:t>Penilaian Berbasis Konteks</a:t>
             </a:r>
             <a:pPr indent="0" marL="0">
               <a:lnSpc>
@@ -19403,7 +19403,7 @@
                 <a:ea typeface="Calibri" pitchFamily="34" charset="-122"/>
                 <a:cs typeface="Calibri" pitchFamily="34" charset="-120"/>
               </a:rPr>
-              <a:t>Karakter pelakunya, relasinya, prosesnya, dan bahasanya.</a:t>
+              <a:t>Yang dinilai adalah karakter pelaku, relasi, proses, dan bahasanya.</a:t>
             </a:r>
             <a:endParaRPr lang="en-US" sz="1350" dirty="0"/>
           </a:p>

--- a/business-ethics/chapter-3/decks/Deck-2-Analisis-Kasus-Oil-Sands.pptx
+++ b/business-ethics/chapter-3/decks/Deck-2-Analisis-Kasus-Oil-Sands.pptx
@@ -3376,7 +3376,7 @@
                 <a:ea typeface="Calibri" pitchFamily="34" charset="-122"/>
                 <a:cs typeface="Calibri" pitchFamily="34" charset="-120"/>
               </a:rPr>
-              <a:t>Most Destructive Project on Earth atau Ethical Oil? Satu kasus dibedah dengan sembilan teori etika normatif dari Chapter 3.</a:t>
+              <a:t>Most Destructive Project on Earth atau Ethical Oil? Satu kasus dianalisis dengan sembilan teori etika normatif dari Chapter 3.</a:t>
             </a:r>
             <a:endParaRPr lang="en-US" sz="1400" dirty="0"/>
           </a:p>
@@ -4117,7 +4117,7 @@
                 <a:ea typeface="Calibri" pitchFamily="34" charset="-122"/>
                 <a:cs typeface="Calibri" pitchFamily="34" charset="-120"/>
               </a:rPr>
-              <a:t>Biaya iklim tidak pernah masuk harga karena generasi mendatang tidak hadir di pasar</a:t>
+              <a:t>Biaya iklim tidak terinternalisasi karena generasi mendatang absen dari pasar</a:t>
             </a:r>
             <a:endParaRPr lang="en-US" sz="1100" dirty="0"/>
           </a:p>
@@ -4276,7 +4276,7 @@
                 <a:ea typeface="Calibri" pitchFamily="34" charset="-122"/>
                 <a:cs typeface="Calibri" pitchFamily="34" charset="-120"/>
               </a:rPr>
-              <a:t>Act mendukung manfaat hari ini, rule menolak karena target Paris menjadi mustahil</a:t>
+              <a:t>Act mendukung manfaat kini, rule menolak karena target Paris menjadi mustahil</a:t>
             </a:r>
             <a:endParaRPr lang="en-US" sz="1100" dirty="0"/>
           </a:p>
@@ -4435,7 +4435,7 @@
                 <a:ea typeface="Calibri" pitchFamily="34" charset="-122"/>
                 <a:cs typeface="Calibri" pitchFamily="34" charset="-120"/>
               </a:rPr>
-              <a:t>Prinsipnya gagal diuniversalkan ke seluruh negara pemilik cadangan terbesar</a:t>
+              <a:t>Prinsipnya gagal diuniversalkan pada seluruh pemilik cadangan terbesar</a:t>
             </a:r>
             <a:endParaRPr lang="en-US" sz="1100" dirty="0"/>
           </a:p>
@@ -4594,7 +4594,7 @@
                 <a:ea typeface="Calibri" pitchFamily="34" charset="-122"/>
                 <a:cs typeface="Calibri" pitchFamily="34" charset="-120"/>
               </a:rPr>
-              <a:t>Hak atas pekerjaan terpenuhi, hak atas kesehatan dan tanah adat dilanggar</a:t>
+              <a:t>Hak atas pekerjaan terpenuhi, hak atas kesehatan dan tanah adat terlanggar</a:t>
             </a:r>
             <a:endParaRPr lang="en-US" sz="1100" dirty="0"/>
           </a:p>
@@ -4912,7 +4912,7 @@
                 <a:ea typeface="Calibri" pitchFamily="34" charset="-122"/>
                 <a:cs typeface="Calibri" pitchFamily="34" charset="-120"/>
               </a:rPr>
-              <a:t>Mengukur diri terhadap negara terburuk adalah perbandingan ke bawah</a:t>
+              <a:t>Pengukuran diri terhadap produsen terburuk merupakan standar terendah</a:t>
             </a:r>
             <a:endParaRPr lang="en-US" sz="1100" dirty="0"/>
           </a:p>
@@ -5071,7 +5071,7 @@
                 <a:ea typeface="Calibri" pitchFamily="34" charset="-122"/>
                 <a:cs typeface="Calibri" pitchFamily="34" charset="-120"/>
               </a:rPr>
-              <a:t>Komunitas hilir dan generasi mendatang adalah relasi, bukan variabel biaya</a:t>
+              <a:t>Komunitas hilir dan generasi mendatang merupakan relasi, bukan variabel biaya</a:t>
             </a:r>
             <a:endParaRPr lang="en-US" sz="1100" dirty="0"/>
           </a:p>
@@ -5230,7 +5230,7 @@
                 <a:ea typeface="Calibri" pitchFamily="34" charset="-122"/>
                 <a:cs typeface="Calibri" pitchFamily="34" charset="-120"/>
               </a:rPr>
-              <a:t>Label ethical oil lahir dari kampanye berdana industri, imparsialitas gagal</a:t>
+              <a:t>Label ethical oil lahir dari kampanye berpendanaan industri, imparsialitas gagal</a:t>
             </a:r>
             <a:endParaRPr lang="en-US" sz="1100" dirty="0"/>
           </a:p>
@@ -5389,7 +5389,7 @@
                 <a:ea typeface="Calibri" pitchFamily="34" charset="-122"/>
                 <a:cs typeface="Calibri" pitchFamily="34" charset="-120"/>
               </a:rPr>
-              <a:t>Perebutan istilah oil sands dan tar sands membuktikan bahasa membentuk moral</a:t>
+              <a:t>Perebutan istilah oil sands dan tar sands menunjukkan bahasa membentuk moral</a:t>
             </a:r>
             <a:endParaRPr lang="en-US" sz="1100" dirty="0"/>
           </a:p>
@@ -5467,7 +5467,7 @@
                 <a:ea typeface="Calibri" pitchFamily="34" charset="-122"/>
                 <a:cs typeface="Calibri" pitchFamily="34" charset="-120"/>
               </a:rPr>
-              <a:t>Tidak satu pun berbunyi mendukung tanpa syarat. Enam dari sembilan menolak, dua bersyarat, satu netral karena mengakui batasnya sendiri.</a:t>
+              <a:t>Tidak satu pun berbunyi mendukung tanpa syarat. Enam menolak, dua bersyarat, satu netral karena mengakui batas teorinya sendiri.</a:t>
             </a:r>
             <a:endParaRPr lang="en-US" sz="1150" dirty="0"/>
           </a:p>
@@ -5791,7 +5791,7 @@
                 <a:ea typeface="Calibri" pitchFamily="34" charset="-122"/>
                 <a:cs typeface="Calibri" pitchFamily="34" charset="-120"/>
               </a:rPr>
-              <a:t>Empat proposisi yang lahir dari kesembilan lensa di atas.</a:t>
+              <a:t>Empat proposisi yang diturunkan dari kesembilan lensa.</a:t>
             </a:r>
             <a:endParaRPr lang="en-US" sz="1350" dirty="0"/>
           </a:p>
@@ -5911,7 +5911,7 @@
                 <a:ea typeface="Calibri" pitchFamily="34" charset="-122"/>
                 <a:cs typeface="Calibri" pitchFamily="34" charset="-120"/>
               </a:rPr>
-              <a:t>Perbandingan ke Bawah Bukan Argumen Moral</a:t>
+              <a:t>Perbandingan Komparatif Tidak Bernilai Normatif</a:t>
             </a:r>
             <a:endParaRPr lang="en-US" sz="1250" dirty="0"/>
           </a:p>
@@ -5953,7 +5953,7 @@
                 <a:ea typeface="Calibri" pitchFamily="34" charset="-122"/>
                 <a:cs typeface="Calibri" pitchFamily="34" charset="-120"/>
               </a:rPr>
-              <a:t>Bahwa Venezuela dan Arab Saudi lebih buruk tidak membuat tindakan Kanada menjadi benar. Virtue ethics menyebutnya mengukur diri pada standar terendah.</a:t>
+              <a:t>Keburukan Venezuela dan Arab Saudi tidak membenarkan tindakan Kanada. Virtue ethics mengategorikannya sebagai pengukuran pada standar terendah.</a:t>
             </a:r>
             <a:endParaRPr lang="en-US" sz="1100" dirty="0"/>
           </a:p>
@@ -6115,7 +6115,7 @@
                 <a:ea typeface="Calibri" pitchFamily="34" charset="-122"/>
                 <a:cs typeface="Calibri" pitchFamily="34" charset="-120"/>
               </a:rPr>
-              <a:t>Label ethical oil lahir dari kampanye berdana industri. Discourse ethics membatalkannya karena syarat imparsialitas gagal sejak awal.</a:t>
+              <a:t>Label ethical oil lahir dari kampanye berpendanaan industri. Discourse ethics membatalkannya karena syarat imparsialitas tidak terpenuhi.</a:t>
             </a:r>
             <a:endParaRPr lang="en-US" sz="1100" dirty="0"/>
           </a:p>
@@ -6235,7 +6235,7 @@
                 <a:ea typeface="Calibri" pitchFamily="34" charset="-122"/>
                 <a:cs typeface="Calibri" pitchFamily="34" charset="-120"/>
               </a:rPr>
-              <a:t>Beban dan Manfaat Jatuh pada Pihak Berbeda</a:t>
+              <a:t>Distribusi Manfaat dan Beban Tidak Simetris</a:t>
             </a:r>
             <a:endParaRPr lang="en-US" sz="1250" dirty="0"/>
           </a:p>
@@ -6277,7 +6277,7 @@
                 <a:ea typeface="Calibri" pitchFamily="34" charset="-122"/>
                 <a:cs typeface="Calibri" pitchFamily="34" charset="-120"/>
               </a:rPr>
-              <a:t>Manfaat tersebar nasional, beban terkonsentrasi pada komunitas hilir dan generasi mendatang. Rawls menolak susunan seperti ini.</a:t>
+              <a:t>Manfaat tersebar nasional, beban terkonsentrasi pada komunitas hilir dan generasi mendatang. Rawls menolak susunan distributif semacam ini.</a:t>
             </a:r>
             <a:endParaRPr lang="en-US" sz="1100" dirty="0"/>
           </a:p>
@@ -6397,7 +6397,7 @@
                 <a:ea typeface="Calibri" pitchFamily="34" charset="-122"/>
                 <a:cs typeface="Calibri" pitchFamily="34" charset="-120"/>
               </a:rPr>
-              <a:t>Prinsipnya Runtuh Ketika Diuniversalkan</a:t>
+              <a:t>Prinsipnya Gugur Ketika Diuniversalkan</a:t>
             </a:r>
             <a:endParaRPr lang="en-US" sz="1250" dirty="0"/>
           </a:p>
@@ -6439,7 +6439,7 @@
                 <a:ea typeface="Calibri" pitchFamily="34" charset="-122"/>
                 <a:cs typeface="Calibri" pitchFamily="34" charset="-120"/>
               </a:rPr>
-              <a:t>Bila seluruh pemilik cadangan terbesar berbuat sama, tidak ada anggaran karbon yang tersisa. Uji Kant gagal di titik ini.</a:t>
+              <a:t>Bila seluruh pemilik cadangan terbesar bertindak identik, tidak tersisa anggaran karbon global. Uji Kant gagal pada titik ini.</a:t>
             </a:r>
             <a:endParaRPr lang="en-US" sz="1100" dirty="0"/>
           </a:p>
@@ -6503,7 +6503,7 @@
                 <a:ea typeface="Calibri" pitchFamily="34" charset="-122"/>
                 <a:cs typeface="Calibri" pitchFamily="34" charset="-120"/>
               </a:rPr>
-              <a:t>Menolak klaim ethical oil bukan berarti menuntut penghentian mendadak. Itu pertanyaan yang berbeda.</a:t>
+              <a:t>Penolakan atas klaim ethical oil tidak setara dengan tuntutan penghentian operasi. Keduanya persoalan terpisah.</a:t>
             </a:r>
             <a:endParaRPr lang="en-US" sz="1150" dirty="0"/>
           </a:p>
@@ -6952,7 +6952,7 @@
                 <a:ea typeface="Calibri" pitchFamily="34" charset="-122"/>
                 <a:cs typeface="Calibri" pitchFamily="34" charset="-120"/>
               </a:rPr>
-              <a:t>Klaim yang lolos satu teori sering runtuh pada teori kedua. Sembilan pertimbangan pada Tabel 3.8 adalah daftar periksa, bukan rencana sepuluh langkah.</a:t>
+              <a:t>Klaim yang lolos satu teori kerap gugur pada teori kedua. Sembilan pertimbangan Tabel 3.8 berfungsi sebagai daftar periksa, bukan prosedur berurutan.</a:t>
             </a:r>
             <a:endParaRPr lang="en-US" sz="1100" dirty="0"/>
           </a:p>
@@ -7119,7 +7119,7 @@
                 <a:ea typeface="Calibri" pitchFamily="34" charset="-122"/>
                 <a:cs typeface="Calibri" pitchFamily="34" charset="-120"/>
               </a:rPr>
-              <a:t>Generasi mendatang dan komunitas hilir tidak punya kursi. Keputusan yang mengabaikan mereka rapuh secara moral sekaligus secara reputasi.</a:t>
+              <a:t>Generasi mendatang dan komunitas hilir tidak terwakili. Keputusan yang mengabaikannya rapuh secara moral sekaligus reputasional.</a:t>
             </a:r>
             <a:endParaRPr lang="en-US" sz="1100" dirty="0"/>
           </a:p>
@@ -7286,7 +7286,7 @@
                 <a:ea typeface="Calibri" pitchFamily="34" charset="-122"/>
                 <a:cs typeface="Calibri" pitchFamily="34" charset="-120"/>
               </a:rPr>
-              <a:t>Oil sands atau tar sands, hilirisasi atau ekstraksi. Pilihan kata menentukan penilaian sebelum datanya sempat dibaca.</a:t>
+              <a:t>Oil sands atau tar sands, hilirisasi atau ekstraksi. Pilihan kata membentuk penilaian sebelum data dianalisis.</a:t>
             </a:r>
             <a:endParaRPr lang="en-US" sz="1100" dirty="0"/>
           </a:p>
@@ -7455,7 +7455,7 @@
                 <a:ea typeface="Calibri" pitchFamily="34" charset="-122"/>
                 <a:cs typeface="Calibri" pitchFamily="34" charset="-120"/>
               </a:rPr>
-              <a:t>Strukturnya nyaris identik. Manfaat ekonominya besar dan terukur, biaya lingkungan dan sosialnya tersebar dan sulit dikuantifikasi. Narasi pembenarnya pun sama: nikel Indonesia dibutuhkan untuk transisi energi dunia.</a:t>
+              <a:t>Struktur dilemanya nyaris identik. Manfaat ekonominya besar dan terukur, biaya lingkungan dan sosialnya tersebar dan sulit dikuantifikasi. Narasi pembenarnya setara: nikel Indonesia dibutuhkan bagi transisi energi global.</a:t>
             </a:r>
             <a:endParaRPr lang="en-US" sz="1200" dirty="0"/>
           </a:p>
@@ -7494,7 +7494,7 @@
                 <a:ea typeface="Calibri" pitchFamily="34" charset="-122"/>
                 <a:cs typeface="Calibri" pitchFamily="34" charset="-120"/>
               </a:rPr>
-              <a:t>Apakah narasi nikel yang etis lolos dari uji yang baru saja kita jalankan?</a:t>
+              <a:t>Apakah narasi nikel yang etis lolos dari kerangka uji yang sama?</a:t>
             </a:r>
             <a:endParaRPr lang="en-US" sz="1250" dirty="0"/>
           </a:p>
@@ -7938,7 +7938,7 @@
                 <a:ea typeface="Calibri" pitchFamily="34" charset="-122"/>
                 <a:cs typeface="Calibri" pitchFamily="34" charset="-120"/>
               </a:rPr>
-              <a:t>Sembilan teori berangkat dari premis yang berbeda, namun enam di antaranya tiba pada arah yang sama. Konvergensi dari pintu masuk yang berbeda itulah bukti terkuat yang bisa dihasilkan pluralism.</a:t>
+              <a:t>Sembilan teori berangkat dari premis berbeda, namun enam di antaranya menghasilkan arah yang sama. Konvergensi dari titik masuk berbeda inilah bukti terkuat yang dapat dihasilkan pluralism.</a:t>
             </a:r>
             <a:endParaRPr lang="en-US" sz="1100" dirty="0"/>
           </a:p>
@@ -8100,7 +8100,7 @@
                 <a:ea typeface="Calibri" pitchFamily="34" charset="-122"/>
                 <a:cs typeface="Calibri" pitchFamily="34" charset="-120"/>
               </a:rPr>
-              <a:t>Yang runtuh bukan industrinya, melainkan klaim bahwa industri ini etis. Pertanyaan tentang transisi, kompensasi, dan reklamasi masih terbuka dan tetap perlu dijawab.</a:t>
+              <a:t>Yang gugur bukan industrinya, melainkan klaim bahwa industri ini etis. Persoalan transisi, kompensasi, dan reklamasi tetap terbuka.</a:t>
             </a:r>
             <a:endParaRPr lang="en-US" sz="1100" dirty="0"/>
           </a:p>
@@ -8262,7 +8262,7 @@
                 <a:ea typeface="Calibri" pitchFamily="34" charset="-122"/>
                 <a:cs typeface="Calibri" pitchFamily="34" charset="-120"/>
               </a:rPr>
-              <a:t>Satu lensa akan memberi jawaban yang rapi dan menyesatkan. Prisma memberi spektrum yang tidak nyaman, tetapi dapat dipertanggungjawabkan kepada seluruh pihak yang terdampak.</a:t>
+              <a:t>Lensa tunggal menghasilkan jawaban yang rapi namun menyesatkan. Prisma menghasilkan spektrum yang tidak nyaman, tetapi dapat dipertanggungjawabkan kepada seluruh pihak terdampak.</a:t>
             </a:r>
             <a:endParaRPr lang="en-US" sz="1100" dirty="0"/>
           </a:p>
@@ -8346,7 +8346,7 @@
                 <a:ea typeface="Calibri" pitchFamily="34" charset="-122"/>
                 <a:cs typeface="Calibri" pitchFamily="34" charset="-120"/>
               </a:rPr>
-              <a:t>Keputusan yang baik bukan yang menemukan teori paling benar, melainkan yang menyadari seluruh spektrum pertimbangan.</a:t>
+              <a:t>Keputusan yang baik bukan yang menemukan teori paling sahih, melainkan yang menyadari seluruh spektrum pertimbangan.</a:t>
             </a:r>
             <a:endParaRPr lang="en-US" sz="1250" dirty="0"/>
           </a:p>
@@ -9498,7 +9498,7 @@
                 <a:ea typeface="Calibri" pitchFamily="34" charset="-122"/>
                 <a:cs typeface="Calibri" pitchFamily="34" charset="-120"/>
               </a:rPr>
-              <a:t>Sembilan lensa, satu kasus, dan tidak ada satu jawaban. Itulah yang membuat kasus ini layak didiskusikan.</a:t>
+              <a:t>Sembilan lensa atas satu kasus tanpa jawaban tunggal. Kondisi inilah yang menjadikan kasus ini layak didiskusikan.</a:t>
             </a:r>
             <a:endParaRPr lang="en-US" sz="1500" dirty="0"/>
           </a:p>
@@ -10427,7 +10427,7 @@
                 <a:ea typeface="Calibri" pitchFamily="34" charset="-122"/>
                 <a:cs typeface="Calibri" pitchFamily="34" charset="-120"/>
               </a:rPr>
-              <a:t>Kenapa satu teori tidak cukup untuk kasus ini</a:t>
+              <a:t>Alasan satu teori tidak memadai untuk kasus ini</a:t>
             </a:r>
             <a:endParaRPr lang="en-US" sz="1150" dirty="0"/>
           </a:p>
@@ -10564,7 +10564,7 @@
                 <a:ea typeface="Calibri" pitchFamily="34" charset="-122"/>
                 <a:cs typeface="Calibri" pitchFamily="34" charset="-120"/>
               </a:rPr>
-              <a:t>Apa yang ditambang, seberapa besar, siapa pemainnya</a:t>
+              <a:t>Objek, skala, dan aktor industrinya</a:t>
             </a:r>
             <a:endParaRPr lang="en-US" sz="1150" dirty="0"/>
           </a:p>
@@ -10701,7 +10701,7 @@
                 <a:ea typeface="Calibri" pitchFamily="34" charset="-122"/>
                 <a:cs typeface="Calibri" pitchFamily="34" charset="-120"/>
               </a:rPr>
-              <a:t>Enam pihak dengan kepentingan yang berbenturan</a:t>
+              <a:t>Enam pihak dengan kepentingan berbenturan</a:t>
             </a:r>
             <a:endParaRPr lang="en-US" sz="1150" dirty="0"/>
           </a:p>
@@ -11386,7 +11386,7 @@
                 <a:ea typeface="Calibri" pitchFamily="34" charset="-122"/>
                 <a:cs typeface="Calibri" pitchFamily="34" charset="-120"/>
               </a:rPr>
-              <a:t>Sembilan sorotan atas fakta yang sama</a:t>
+              <a:t>Sembilan penilaian atas fakta yang identik</a:t>
             </a:r>
             <a:endParaRPr lang="en-US" sz="1150" dirty="0"/>
           </a:p>
@@ -12004,7 +12004,7 @@
                 <a:ea typeface="Calibri" pitchFamily="34" charset="-122"/>
                 <a:cs typeface="Calibri" pitchFamily="34" charset="-120"/>
               </a:rPr>
-              <a:t>Kasus ini tidak memiliki jawaban tunggal, sehingga dibedah dengan sembilan teori.</a:t>
+              <a:t>Kasus tanpa jawaban tunggal menuntut kerangka penilaian yang jamak.</a:t>
             </a:r>
             <a:endParaRPr lang="en-US" sz="1350" dirty="0"/>
           </a:p>
@@ -12151,7 +12151,7 @@
                 <a:ea typeface="Calibri" pitchFamily="34" charset="-122"/>
                 <a:cs typeface="Calibri" pitchFamily="34" charset="-120"/>
               </a:rPr>
-              <a:t>Kasus dipusatkan menjadi satu pertimbangan tunggal. Kesimpulannya rapi, tetapi seluruh keberatan pihak lain hilang dari pandangan dan tidak pernah terjawab.</a:t>
+              <a:t>Kasus direduksi menjadi satu pertimbangan normatif. Kesimpulannya tegas, namun keberatan pihak lain tidak terakomodasi.</a:t>
             </a:r>
             <a:endParaRPr lang="en-US" sz="1250" dirty="0"/>
           </a:p>
@@ -12293,7 +12293,7 @@
                 <a:ea typeface="Calibri" pitchFamily="34" charset="-122"/>
                 <a:cs typeface="Calibri" pitchFamily="34" charset="-120"/>
               </a:rPr>
-              <a:t>Setiap teori menyinari sisi yang tidak terlihat teori lain. Yang dicari bukan jawaban tunggal, melainkan pertimbangan mana yang paling berat menanggung beban argumen.</a:t>
+              <a:t>Setiap teori menyoroti dimensi yang luput dari teori lain. Yang dicari bukan jawaban tunggal, melainkan pertimbangan yang paling kuat menanggung beban argumen.</a:t>
             </a:r>
             <a:endParaRPr lang="en-US" sz="1250" dirty="0"/>
           </a:p>
@@ -12332,7 +12332,7 @@
                 <a:ea typeface="Calibri" pitchFamily="34" charset="-122"/>
                 <a:cs typeface="Calibri" pitchFamily="34" charset="-120"/>
               </a:rPr>
-              <a:t>Sembilan lensa yang akan dijalankan</a:t>
+              <a:t>Sembilan lensa analisis</a:t>
             </a:r>
             <a:endParaRPr lang="en-US" sz="1200" dirty="0"/>
           </a:p>
@@ -12927,7 +12927,7 @@
                 <a:ea typeface="Calibri" pitchFamily="34" charset="-122"/>
                 <a:cs typeface="Calibri" pitchFamily="34" charset="-120"/>
               </a:rPr>
-              <a:t>Sembilan sorotan atas satu rangkaian fakta yang sama. Itulah prisma pada Figure 3.2.</a:t>
+              <a:t>Sembilan penilaian atas satu rangkaian fakta yang identik. Inilah prisma pada Figure 3.2.</a:t>
             </a:r>
             <a:endParaRPr lang="en-US" sz="1150" dirty="0"/>
           </a:p>
@@ -13251,7 +13251,7 @@
                 <a:ea typeface="Calibri" pitchFamily="34" charset="-122"/>
                 <a:cs typeface="Calibri" pitchFamily="34" charset="-120"/>
               </a:rPr>
-              <a:t>Campuran pasir, lempung, air, dan bitumen yang berat dan sangat kental.</a:t>
+              <a:t>Campuran pasir, lempung, air, dan bitumen berviskositas tinggi.</a:t>
             </a:r>
             <a:endParaRPr lang="en-US" sz="1350" dirty="0"/>
           </a:p>
@@ -13368,7 +13368,7 @@
                 <a:ea typeface="Calibri" pitchFamily="34" charset="-122"/>
                 <a:cs typeface="Calibri" pitchFamily="34" charset="-120"/>
               </a:rPr>
-              <a:t>Luas deposit di Alberta, dengan Fort McMurray sebagai pusat industrinya</a:t>
+              <a:t>Luas deposit di Alberta dengan Fort McMurray sebagai pusat industri</a:t>
             </a:r>
             <a:endParaRPr lang="en-US" sz="1100" dirty="0"/>
           </a:p>
@@ -13602,7 +13602,7 @@
                 <a:ea typeface="Calibri" pitchFamily="34" charset="-122"/>
                 <a:cs typeface="Calibri" pitchFamily="34" charset="-120"/>
               </a:rPr>
-              <a:t>Cadangan terbukti Kanada, terbesar ketiga di dunia setelah Venezuela</a:t>
+              <a:t>Cadangan terbukti Kanada, terbesar ketiga secara global</a:t>
             </a:r>
             <a:endParaRPr lang="en-US" sz="1100" dirty="0"/>
           </a:p>
@@ -13719,7 +13719,7 @@
                 <a:ea typeface="Calibri" pitchFamily="34" charset="-122"/>
                 <a:cs typeface="Calibri" pitchFamily="34" charset="-120"/>
               </a:rPr>
-              <a:t>Ekspor minyak Kanada yang mengalir ke Amerika Serikat</a:t>
+              <a:t>Ekspor minyak Kanada dengan tujuan Amerika Serikat</a:t>
             </a:r>
             <a:endParaRPr lang="en-US" sz="1100" dirty="0"/>
           </a:p>
@@ -13758,7 +13758,7 @@
                 <a:ea typeface="Calibri" pitchFamily="34" charset="-122"/>
                 <a:cs typeface="Calibri" pitchFamily="34" charset="-120"/>
               </a:rPr>
-              <a:t>Perjalanan pengembangannya</a:t>
+              <a:t>Kronologi pengembangan industri</a:t>
             </a:r>
             <a:endParaRPr lang="en-US" sz="1200" dirty="0"/>
           </a:p>
@@ -13934,7 +13934,7 @@
                 <a:ea typeface="Calibri" pitchFamily="34" charset="-122"/>
                 <a:cs typeface="Calibri" pitchFamily="34" charset="-120"/>
               </a:rPr>
-              <a:t>Operasi komersial dimulai serius, tetapi lambat karena biaya ekstraksi tinggi</a:t>
+              <a:t>Operasi komersial dimulai, terhambat biaya ekstraksi yang tinggi</a:t>
             </a:r>
             <a:endParaRPr lang="en-US" sz="1150" dirty="0"/>
           </a:p>
@@ -14032,7 +14032,7 @@
                 <a:ea typeface="Calibri" pitchFamily="34" charset="-122"/>
                 <a:cs typeface="Calibri" pitchFamily="34" charset="-120"/>
               </a:rPr>
-              <a:t>Harga minyak melonjak. Shell, Chevron, Total, Exxon, dan CNOOC masuk</a:t>
+              <a:t>Lonjakan harga minyak menarik masuk Shell, Chevron, Total, Exxon, dan CNOOC</a:t>
             </a:r>
             <a:endParaRPr lang="en-US" sz="1150" dirty="0"/>
           </a:p>
@@ -14130,7 +14130,7 @@
                 <a:ea typeface="Calibri" pitchFamily="34" charset="-122"/>
                 <a:cs typeface="Calibri" pitchFamily="34" charset="-120"/>
               </a:rPr>
-              <a:t>Investasi tahunan memuncak di atas 30 miliar dolar Amerika</a:t>
+              <a:t>Investasi tahunan mencapai puncak di atas 30 miliar dolar Amerika</a:t>
             </a:r>
             <a:endParaRPr lang="en-US" sz="1150" dirty="0"/>
           </a:p>
@@ -14228,7 +14228,7 @@
                 <a:ea typeface="Calibri" pitchFamily="34" charset="-122"/>
                 <a:cs typeface="Calibri" pitchFamily="34" charset="-120"/>
               </a:rPr>
-              <a:t>Investasi turun sampai dua pertiga menjadi sekitar 10 miliar dolar per tahun</a:t>
+              <a:t>Investasi terkoreksi dua pertiga menjadi sekitar 10 miliar dolar per tahun</a:t>
             </a:r>
             <a:endParaRPr lang="en-US" sz="1150" dirty="0"/>
           </a:p>
@@ -14552,7 +14552,7 @@
                 <a:ea typeface="Calibri" pitchFamily="34" charset="-122"/>
                 <a:cs typeface="Calibri" pitchFamily="34" charset="-120"/>
               </a:rPr>
-              <a:t>Setiap teori berikutnya memberi bobot berbeda pada keenam pihak ini.</a:t>
+              <a:t>Setiap teori berikutnya membobot keenam pihak ini secara berbeda.</a:t>
             </a:r>
             <a:endParaRPr lang="en-US" sz="1350" dirty="0"/>
           </a:p>
@@ -14719,7 +14719,7 @@
                 <a:ea typeface="Calibri" pitchFamily="34" charset="-122"/>
                 <a:cs typeface="Calibri" pitchFamily="34" charset="-120"/>
               </a:rPr>
-              <a:t>Pendapatan pajak, lapangan kerja, dan kedaulatan energi provinsi.</a:t>
+              <a:t>Penerimaan pajak, penyerapan tenaga kerja, dan kedaulatan energi provinsi.</a:t>
             </a:r>
             <a:endParaRPr lang="en-US" sz="1150" dirty="0"/>
           </a:p>
@@ -15053,7 +15053,7 @@
                 <a:ea typeface="Calibri" pitchFamily="34" charset="-122"/>
                 <a:cs typeface="Calibri" pitchFamily="34" charset="-120"/>
               </a:rPr>
-              <a:t>Penghidupan langsung 206.000 orang beserta keluarganya.</a:t>
+              <a:t>Penghidupan langsung bagi 206.000 pekerja beserta keluarganya.</a:t>
             </a:r>
             <a:endParaRPr lang="en-US" sz="1150" dirty="0"/>
           </a:p>
@@ -15220,7 +15220,7 @@
                 <a:ea typeface="Calibri" pitchFamily="34" charset="-122"/>
                 <a:cs typeface="Calibri" pitchFamily="34" charset="-120"/>
               </a:rPr>
-              <a:t>Air, ikan, dan tanah adat di sepanjang Sungai Athabasca.</a:t>
+              <a:t>Sumber air, perikanan, dan tanah adat sepanjang Sungai Athabasca.</a:t>
             </a:r>
             <a:endParaRPr lang="en-US" sz="1150" dirty="0"/>
           </a:p>
@@ -15554,7 +15554,7 @@
                 <a:ea typeface="Calibri" pitchFamily="34" charset="-122"/>
                 <a:cs typeface="Calibri" pitchFamily="34" charset="-120"/>
               </a:rPr>
-              <a:t>Menanggung akibat iklim tanpa pernah hadir di meja perundingan.</a:t>
+              <a:t>Menanggung akibat iklim tanpa keterwakilan dalam proses pengambilan keputusan.</a:t>
             </a:r>
             <a:endParaRPr lang="en-US" sz="1150" dirty="0"/>
           </a:p>
@@ -15618,7 +15618,7 @@
                 <a:ea typeface="Calibri" pitchFamily="34" charset="-122"/>
                 <a:cs typeface="Calibri" pitchFamily="34" charset="-120"/>
               </a:rPr>
-              <a:t>Dua pihak terakhir tidak punya kursi di meja perundingan. Itu titik lemah paling serius dalam kasus ini.</a:t>
+              <a:t>Dua pihak terakhir tidak terwakili dalam proses pengambilan keputusan. Inilah kelemahan struktural kasus ini.</a:t>
             </a:r>
             <a:endParaRPr lang="en-US" sz="1150" dirty="0"/>
           </a:p>
@@ -16111,7 +16111,7 @@
                 <a:ea typeface="Calibri" pitchFamily="34" charset="-122"/>
                 <a:cs typeface="Calibri" pitchFamily="34" charset="-120"/>
               </a:rPr>
-              <a:t>20 persen lebih tinggi daripada minyak konvensional, 10 persen emisi nasional Kanada</a:t>
+              <a:t>20 persen di atas minyak konvensional, 10 persen emisi nasional Kanada</a:t>
             </a:r>
             <a:endParaRPr lang="en-US" sz="1100" dirty="0"/>
           </a:p>
@@ -16192,7 +16192,7 @@
                 <a:ea typeface="Calibri" pitchFamily="34" charset="-122"/>
                 <a:cs typeface="Calibri" pitchFamily="34" charset="-120"/>
               </a:rPr>
-              <a:t>Kolam beracun 220 kilometer persegi berisi sekitar 1 triliun liter yang bocor</a:t>
+              <a:t>Kolam beracun 220 kilometer persegi berisi sekitar 1 triliun liter, terindikasi bocor</a:t>
             </a:r>
             <a:endParaRPr lang="en-US" sz="1100" dirty="0"/>
           </a:p>
@@ -16273,7 +16273,7 @@
                 <a:ea typeface="Calibri" pitchFamily="34" charset="-122"/>
                 <a:cs typeface="Calibri" pitchFamily="34" charset="-120"/>
               </a:rPr>
-              <a:t>Hutan boreal seluas Kota New York telah hancur, hanya 11 persen direklamasi</a:t>
+              <a:t>Hutan boreal seluas Kota New York hilang, reklamasi baru mencapai 11 persen</a:t>
             </a:r>
             <a:endParaRPr lang="en-US" sz="1100" dirty="0"/>
           </a:p>
@@ -16808,7 +16808,7 @@
                 <a:ea typeface="Calibri" pitchFamily="34" charset="-122"/>
                 <a:cs typeface="Calibri" pitchFamily="34" charset="-120"/>
               </a:rPr>
-              <a:t>Diatur secara demokratis, tidak terjerat korupsi seperti produsen lain</a:t>
+              <a:t>Tata kelola demokratis dan bebas korupsi, berbeda dari produsen pembanding</a:t>
             </a:r>
             <a:endParaRPr lang="en-US" sz="1100" dirty="0"/>
           </a:p>
@@ -16872,7 +16872,7 @@
                 <a:ea typeface="Calibri" pitchFamily="34" charset="-122"/>
                 <a:cs typeface="Calibri" pitchFamily="34" charset="-120"/>
               </a:rPr>
-              <a:t>Kedua kolom memakai data resmi yang sama sahnya. Sengketa ini bukan sengketa fakta, melainkan sengketa tentang apa yang layak dihitung.</a:t>
+              <a:t>Kedua kolom merujuk data resmi yang sama sahnya. Sengketanya bukan sengketa fakta, melainkan sengketa kriteria penilaian.</a:t>
             </a:r>
             <a:endParaRPr lang="en-US" sz="1250" dirty="0"/>
           </a:p>
@@ -17196,7 +17196,7 @@
                 <a:ea typeface="Calibri" pitchFamily="34" charset="-122"/>
                 <a:cs typeface="Calibri" pitchFamily="34" charset="-120"/>
               </a:rPr>
-              <a:t>Yang dinilai adalah hasil, bukan niat atau prosedurnya.</a:t>
+              <a:t>Objek penilaiannya hasil tindakan, bukan niat atau prosedurnya.</a:t>
             </a:r>
             <a:endParaRPr lang="en-US" sz="1350" dirty="0"/>
           </a:p>
@@ -17363,7 +17363,7 @@
                 <a:ea typeface="Calibri" pitchFamily="34" charset="-122"/>
                 <a:cs typeface="Calibri" pitchFamily="34" charset="-120"/>
               </a:rPr>
-              <a:t>Apakah ini kepentingan jangka panjang terbaik bagi Kanada dan perusahaannya?</a:t>
+              <a:t>Apakah kebijakan ini melayani kepentingan jangka panjang Kanada dan korporasinya?</a:t>
             </a:r>
             <a:endParaRPr lang="en-US" sz="1100" dirty="0"/>
           </a:p>
@@ -17405,7 +17405,7 @@
                 <a:ea typeface="Calibri" pitchFamily="34" charset="-122"/>
                 <a:cs typeface="Calibri" pitchFamily="34" charset="-120"/>
               </a:rPr>
-              <a:t>Jangka pendek, jawabannya iya. Pajak, lapangan kerja, dan kedaulatan energi seluruhnya bertambah.</a:t>
+              <a:t>Pada horizon pendek, jawabannya afirmatif. Penerimaan pajak, penyerapan tenaga kerja, dan kedaulatan energi seluruhnya meningkat.</a:t>
             </a:r>
             <a:endParaRPr lang="en-US" sz="1150" dirty="0"/>
           </a:p>
@@ -17434,7 +17434,7 @@
                 <a:ea typeface="Calibri" pitchFamily="34" charset="-122"/>
                 <a:cs typeface="Calibri" pitchFamily="34" charset="-120"/>
               </a:rPr>
-              <a:t>Masalahnya ada pada kata jangka panjang. Biaya iklim tidak pernah masuk ke dalam harga, karena generasi yang menanggungnya tidak hadir di pasar untuk menawar. Inilah market failure yang diakui egoism sendiri sebagai batas teorinya.</a:t>
+              <a:t>Persoalannya terletak pada horizon panjang. Biaya iklim tidak terinternalisasi ke dalam harga karena generasi penanggungnya absen dari pasar. Inilah market failure yang diakui egoism sebagai batas teorinya.</a:t>
             </a:r>
             <a:endParaRPr lang="en-US" sz="1150" dirty="0"/>
           </a:p>
@@ -17662,7 +17662,7 @@
                 <a:ea typeface="Calibri" pitchFamily="34" charset="-122"/>
                 <a:cs typeface="Calibri" pitchFamily="34" charset="-120"/>
               </a:rPr>
-              <a:t>Bila seluruh akibat untuk semua pihak dihitung, apakah kita lebih baik?</a:t>
+              <a:t>Bila seluruh akibat bagi semua pihak diagregasi, apakah hasilnya positif?</a:t>
             </a:r>
             <a:endParaRPr lang="en-US" sz="1100" dirty="0"/>
           </a:p>
@@ -17704,7 +17704,7 @@
                 <a:ea typeface="Calibri" pitchFamily="34" charset="-122"/>
                 <a:cs typeface="Calibri" pitchFamily="34" charset="-120"/>
               </a:rPr>
-              <a:t>Act utilitarianism cenderung mendukung. Manfaat 206.000 pekerjaan hari ini nyata dan terukur, sedangkan kerugiannya tersebar dan sulit dikuantifikasi.</a:t>
+              <a:t>Act utilitarianism cenderung mendukung. Manfaat 206.000 lapangan kerja bersifat nyata dan terukur, sedangkan kerugiannya tersebar dan sulit dikuantifikasi.</a:t>
             </a:r>
             <a:endParaRPr lang="en-US" sz="1150" dirty="0"/>
           </a:p>
@@ -17858,7 +17858,7 @@
                 <a:ea typeface="Calibri" pitchFamily="34" charset="-122"/>
                 <a:cs typeface="Calibri" pitchFamily="34" charset="-120"/>
               </a:rPr>
-              <a:t>Dua teori dari keluarga yang sama, dua kesimpulan berbeda. Yang memisahkan hanya unit analisisnya.</a:t>
+              <a:t>Dua teori sekeluarga menghasilkan kesimpulan berbeda. Pemisahnya semata unit analisis.</a:t>
             </a:r>
             <a:endParaRPr lang="en-US" sz="1150" dirty="0"/>
           </a:p>
@@ -18182,7 +18182,7 @@
                 <a:ea typeface="Calibri" pitchFamily="34" charset="-122"/>
                 <a:cs typeface="Calibri" pitchFamily="34" charset="-120"/>
               </a:rPr>
-              <a:t>Yang dinilai adalah kewajiban, hak, dan keadilan distribusinya.</a:t>
+              <a:t>Objek penilaiannya kewajiban, hak, dan keadilan distributif.</a:t>
             </a:r>
             <a:endParaRPr lang="en-US" sz="1350" dirty="0"/>
           </a:p>
@@ -18349,7 +18349,7 @@
                 <a:ea typeface="Calibri" pitchFamily="34" charset="-122"/>
                 <a:cs typeface="Calibri" pitchFamily="34" charset="-120"/>
               </a:rPr>
-              <a:t>Apa yang terjadi bila setiap negara bertindak seperti Kanada?</a:t>
+              <a:t>Dapatkah prinsip yang dianut Kanada diuniversalkan ke seluruh negara?</a:t>
             </a:r>
             <a:endParaRPr lang="en-US" sz="1100" dirty="0"/>
           </a:p>
@@ -18391,7 +18391,7 @@
                 <a:ea typeface="Calibri" pitchFamily="34" charset="-122"/>
                 <a:cs typeface="Calibri" pitchFamily="34" charset="-120"/>
               </a:rPr>
-              <a:t>Kanada memegang cadangan terbukti terbesar ketiga. Bila Venezuela, Arab Saudi, Iran, dan Irak menerapkan prinsip yang sama, tidak ada anggaran karbon yang tersisa.</a:t>
+              <a:t>Kanada memegang cadangan terbukti terbesar ketiga. Bila Venezuela, Arab Saudi, Iran, dan Irak menerapkan prinsip identik, tidak tersisa anggaran karbon global.</a:t>
             </a:r>
             <a:endParaRPr lang="en-US" sz="1150" dirty="0"/>
           </a:p>
@@ -18420,7 +18420,7 @@
                 <a:ea typeface="Calibri" pitchFamily="34" charset="-122"/>
                 <a:cs typeface="Calibri" pitchFamily="34" charset="-120"/>
               </a:rPr>
-              <a:t>Maksim ini gagal diuniversalkan. Itu cukup untuk membatalkannya menurut Kant.</a:t>
+              <a:t>Maksim tersebut gagal diuniversalkan. Kegagalan ini memadai untuk membatalkannya menurut Kant.</a:t>
             </a:r>
             <a:endParaRPr lang="en-US" sz="1150" dirty="0"/>
           </a:p>
@@ -18648,7 +18648,7 @@
                 <a:ea typeface="Calibri" pitchFamily="34" charset="-122"/>
                 <a:cs typeface="Calibri" pitchFamily="34" charset="-120"/>
               </a:rPr>
-              <a:t>Hak siapa yang perlu dipertimbangkan, dan apakah martabatnya dihormati?</a:t>
+              <a:t>Hak siapa yang wajib dipertimbangkan, dan apakah martabatnya dihormati?</a:t>
             </a:r>
             <a:endParaRPr lang="en-US" sz="1100" dirty="0"/>
           </a:p>
@@ -18690,7 +18690,7 @@
                 <a:ea typeface="Calibri" pitchFamily="34" charset="-122"/>
                 <a:cs typeface="Calibri" pitchFamily="34" charset="-120"/>
               </a:rPr>
-              <a:t>Pasal 23 UDHR mendukung: hak atas pekerjaan dan kondisi kerja yang adil terpenuhi bagi 206.000 orang.</a:t>
+              <a:t>Pasal 23 UDHR mendukung: hak atas pekerjaan dan kondisi kerja yang adil terpenuhi bagi 206.000 pekerja.</a:t>
             </a:r>
             <a:endParaRPr lang="en-US" sz="1150" dirty="0"/>
           </a:p>
@@ -18719,7 +18719,7 @@
                 <a:ea typeface="Calibri" pitchFamily="34" charset="-122"/>
                 <a:cs typeface="Calibri" pitchFamily="34" charset="-120"/>
               </a:rPr>
-              <a:t>Namun hak atas kesehatan komunitas hilir Athabasca dan hak atas tanah adat menentang. Prinsip Ruggie menuntut perusahaan menghormati hak lewat seluruh relasi bisnisnya.</a:t>
+              <a:t>Sebaliknya, hak atas kesehatan komunitas hilir Athabasca dan hak atas tanah adat terlanggar. Prinsip Ruggie menuntut penghormatan hak pada seluruh relasi bisnis.</a:t>
             </a:r>
             <a:endParaRPr lang="en-US" sz="1150" dirty="0"/>
           </a:p>
@@ -18920,7 +18920,7 @@
         <p:spPr>
           <a:xfrm>
             <a:off x="8304581" y="2642616"/>
-            <a:ext cx="3027578" cy="368300"/>
+            <a:ext cx="3027578" cy="552450"/>
           </a:xfrm>
           <a:prstGeom prst="rect">
             <a:avLst/>
@@ -18947,7 +18947,7 @@
                 <a:ea typeface="Calibri" pitchFamily="34" charset="-122"/>
                 <a:cs typeface="Calibri" pitchFamily="34" charset="-120"/>
               </a:rPr>
-              <a:t>Aturan apa yang Anda pilih bila tidak tahu akan terlahir sebagai siapa?</a:t>
+              <a:t>Prinsip apa yang dipilih tanpa mengetahui posisi sosial yang akan ditempati?</a:t>
             </a:r>
             <a:endParaRPr lang="en-US" sz="1100" dirty="0"/>
           </a:p>
@@ -18961,8 +18961,8 @@
         </p:nvSpPr>
         <p:spPr>
           <a:xfrm>
-            <a:off x="8304581" y="3175508"/>
-            <a:ext cx="3027578" cy="2073148"/>
+            <a:off x="8304581" y="3359658"/>
+            <a:ext cx="3027578" cy="1888998"/>
           </a:xfrm>
           <a:prstGeom prst="rect">
             <a:avLst/>
@@ -18989,7 +18989,7 @@
                 <a:ea typeface="Calibri" pitchFamily="34" charset="-122"/>
                 <a:cs typeface="Calibri" pitchFamily="34" charset="-120"/>
               </a:rPr>
-              <a:t>Manfaatnya tersebar secara nasional, bebannya terkonsentrasi pada komunitas hilir dan generasi mendatang.</a:t>
+              <a:t>Manfaat tersebar secara nasional, sedangkan beban terkonsentrasi pada komunitas hilir dan generasi mendatang.</a:t>
             </a:r>
             <a:endParaRPr lang="en-US" sz="1150" dirty="0"/>
           </a:p>
@@ -19018,7 +19018,7 @@
                 <a:ea typeface="Calibri" pitchFamily="34" charset="-122"/>
                 <a:cs typeface="Calibri" pitchFamily="34" charset="-120"/>
               </a:rPr>
-              <a:t>Kriteria pertama Rawls tidak terpenuhi: kebebasan dasar atas air bersih dan kesehatan tidak terwujud sama rata, sehingga ketimpangan berikutnya tidak boleh dibenarkan.</a:t>
+              <a:t>Kriteria pertama Rawls tidak terpenuhi: kebebasan dasar atas air bersih dan kesehatan tidak merata, sehingga ketimpangan berikutnya tidak dapat dibenarkan.</a:t>
             </a:r>
             <a:endParaRPr lang="en-US" sz="1150" dirty="0"/>
           </a:p>
@@ -19403,7 +19403,7 @@
                 <a:ea typeface="Calibri" pitchFamily="34" charset="-122"/>
                 <a:cs typeface="Calibri" pitchFamily="34" charset="-120"/>
               </a:rPr>
-              <a:t>Yang dinilai adalah karakter pelaku, relasi, proses, dan bahasanya.</a:t>
+              <a:t>Objek penilaiannya karakter pelaku, relasi, prosedur, dan bahasa.</a:t>
             </a:r>
             <a:endParaRPr lang="en-US" sz="1350" dirty="0"/>
           </a:p>
@@ -19570,7 +19570,7 @@
                 <a:ea typeface="Calibri" pitchFamily="34" charset="-122"/>
                 <a:cs typeface="Calibri" pitchFamily="34" charset="-120"/>
               </a:rPr>
-              <a:t>Apa yang akan dilakukan orang yang layak dan jujur dalam posisi ini?</a:t>
+              <a:t>Bagaimana aktor berkarakter baik bertindak pada posisi ini?</a:t>
             </a:r>
             <a:endParaRPr lang="en-US" sz="1100" dirty="0"/>
           </a:p>
@@ -19612,7 +19612,7 @@
                 <a:ea typeface="Calibri" pitchFamily="34" charset="-122"/>
                 <a:cs typeface="Calibri" pitchFamily="34" charset="-120"/>
               </a:rPr>
-              <a:t>Mengukur diri terhadap negara terburuk adalah perbandingan ke bawah. Orang yang berbudi mengukur diri terhadap yang terbaik.</a:t>
+              <a:t>Pengukuran diri terhadap produsen terburuk merupakan standar terendah. Aktor berkarakter baik mengacu pada standar tertinggi.</a:t>
             </a:r>
             <a:endParaRPr lang="en-US" sz="1150" dirty="0"/>
           </a:p>
@@ -19840,7 +19840,7 @@
                 <a:ea typeface="Calibri" pitchFamily="34" charset="-122"/>
                 <a:cs typeface="Calibri" pitchFamily="34" charset="-120"/>
               </a:rPr>
-              <a:t>Bagaimana perasaan pihak lain, dan solusi mana yang memelihara relasi?</a:t>
+              <a:t>Solusi mana yang memelihara relasi dengan pihak terdampak?</a:t>
             </a:r>
             <a:endParaRPr lang="en-US" sz="1100" dirty="0"/>
           </a:p>
@@ -19882,7 +19882,7 @@
                 <a:ea typeface="Calibri" pitchFamily="34" charset="-122"/>
                 <a:cs typeface="Calibri" pitchFamily="34" charset="-120"/>
               </a:rPr>
-              <a:t>Komunitas hilir dan generasi mendatang adalah pihak yang berelasi, bukan variabel biaya. Yang dituntut adalah transisi yang adil, bukan penghentian mendadak.</a:t>
+              <a:t>Komunitas hilir dan generasi mendatang merupakan pihak berelasi, bukan variabel biaya. Yang dituntut transisi yang adil, bukan penghentian mendadak.</a:t>
             </a:r>
             <a:endParaRPr lang="en-US" sz="1150" dirty="0"/>
           </a:p>
@@ -20110,7 +20110,7 @@
                 <a:ea typeface="Calibri" pitchFamily="34" charset="-122"/>
                 <a:cs typeface="Calibri" pitchFamily="34" charset="-120"/>
               </a:rPr>
-              <a:t>Norma apa yang dapat disusun bersama lewat komunikasi yang terbuka?</a:t>
+              <a:t>Norma apa yang dapat dirumuskan melalui deliberasi terbuka?</a:t>
             </a:r>
             <a:endParaRPr lang="en-US" sz="1100" dirty="0"/>
           </a:p>
@@ -20152,7 +20152,7 @@
                 <a:ea typeface="Calibri" pitchFamily="34" charset="-122"/>
                 <a:cs typeface="Calibri" pitchFamily="34" charset="-120"/>
               </a:rPr>
-              <a:t>Label ethical oil lahir dari kampanye berdana industri. Syarat imparsialitas dan tanpa manipulasi persuasif gagal dipenuhi sejak awal.</a:t>
+              <a:t>Label ethical oil lahir dari kampanye berpendanaan industri. Syarat imparsialitas dan bebas manipulasi persuasif tidak terpenuhi.</a:t>
             </a:r>
             <a:endParaRPr lang="en-US" sz="1150" dirty="0"/>
           </a:p>
@@ -20380,7 +20380,7 @@
                 <a:ea typeface="Calibri" pitchFamily="34" charset="-122"/>
                 <a:cs typeface="Calibri" pitchFamily="34" charset="-120"/>
               </a:rPr>
-              <a:t>Siapa yang diuntungkan oleh istilah yang dipakai untuk menyebut hal ini?</a:t>
+              <a:t>Kepentingan siapa yang dilayani oleh pemilihan istilah?</a:t>
             </a:r>
             <a:endParaRPr lang="en-US" sz="1100" dirty="0"/>
           </a:p>
@@ -20422,7 +20422,7 @@
                 <a:ea typeface="Calibri" pitchFamily="34" charset="-122"/>
                 <a:cs typeface="Calibri" pitchFamily="34" charset="-120"/>
               </a:rPr>
-              <a:t>Oil sands terdengar netral, tar sands terdengar kotor. Perebutan istilah ini membuktikan bahasa ikut membentuk penilaian moral.</a:t>
+              <a:t>Oil sands berkonotasi netral, tar sands berkonotasi merusak. Perebutan istilah menunjukkan bahasa turut membentuk penilaian moral.</a:t>
             </a:r>
             <a:endParaRPr lang="en-US" sz="1150" dirty="0"/>
           </a:p>

--- a/business-ethics/chapter-3/decks/Deck-2-Analisis-Kasus-Oil-Sands.pptx
+++ b/business-ethics/chapter-3/decks/Deck-2-Analisis-Kasus-Oil-Sands.pptx
@@ -3216,7 +3216,7 @@
                 <a:ea typeface="Calibri" pitchFamily="34" charset="-122"/>
                 <a:cs typeface="Calibri" pitchFamily="34" charset="-120"/>
               </a:rPr>
-              <a:t>Chapter 3 · Evaluating Business Ethics</a:t>
+              <a:t>Evaluating Business Ethics</a:t>
             </a:r>
             <a:endParaRPr lang="en-US" sz="1350" dirty="0"/>
           </a:p>
@@ -3376,7 +3376,7 @@
                 <a:ea typeface="Calibri" pitchFamily="34" charset="-122"/>
                 <a:cs typeface="Calibri" pitchFamily="34" charset="-120"/>
               </a:rPr>
-              <a:t>Most Destructive Project on Earth atau Ethical Oil? Satu kasus dianalisis dengan sembilan teori etika normatif dari Chapter 3.</a:t>
+              <a:t>Most Destructive Project on Earth atau Ethical Oil? Satu kasus dianalisis dengan sembilan teori etika normatif.</a:t>
             </a:r>
             <a:endParaRPr lang="en-US" sz="1400" dirty="0"/>
           </a:p>
@@ -3681,45 +3681,6 @@
           </a:solidFill>
           <a:ln/>
         </p:spPr>
-      </p:sp>
-      <p:sp>
-        <p:nvSpPr>
-          <p:cNvPr id="73" name="Text 71"/>
-          <p:cNvSpPr txBox="1"/>
-          <p:nvPr/>
-        </p:nvSpPr>
-        <p:spPr>
-          <a:xfrm>
-            <a:off x="621792" y="6272784"/>
-            <a:ext cx="10948111" cy="256032"/>
-          </a:xfrm>
-          <a:prstGeom prst="rect">
-            <a:avLst/>
-          </a:prstGeom>
-          <a:noFill/>
-          <a:ln/>
-        </p:spPr>
-        <p:txBody>
-          <a:bodyPr wrap="square" lIns="0" tIns="0" rIns="0" bIns="0" rtlCol="0" anchor="t"/>
-          <a:lstStyle/>
-          <a:p>
-            <a:pPr indent="0" marL="0">
-              <a:buNone/>
-            </a:pPr>
-            <a:r>
-              <a:rPr lang="en-US" sz="1050" dirty="0">
-                <a:solidFill>
-                  <a:srgbClr val="8C93A3"/>
-                </a:solidFill>
-                <a:latin typeface="Calibri" pitchFamily="34" charset="0"/>
-                <a:ea typeface="Calibri" pitchFamily="34" charset="-122"/>
-                <a:cs typeface="Calibri" pitchFamily="34" charset="-120"/>
-              </a:rPr>
-              <a:t>Case 3 · Crane, Matten, Glozer &amp; Spence (2019), halaman 129–134</a:t>
-            </a:r>
-            <a:endParaRPr lang="en-US" sz="1050" dirty="0"/>
-          </a:p>
-        </p:txBody>
       </p:sp>
     </p:spTree>
   </p:cSld>
@@ -6952,7 +6913,7 @@
                 <a:ea typeface="Calibri" pitchFamily="34" charset="-122"/>
                 <a:cs typeface="Calibri" pitchFamily="34" charset="-120"/>
               </a:rPr>
-              <a:t>Klaim yang lolos satu teori kerap gugur pada teori kedua. Sembilan pertimbangan Tabel 3.8 berfungsi sebagai daftar periksa, bukan prosedur berurutan.</a:t>
+              <a:t>Klaim yang lolos satu teori kerap gugur pada teori kedua. Sembilan pertimbangan etis berfungsi sebagai daftar periksa, bukan prosedur berurutan.</a:t>
             </a:r>
             <a:endParaRPr lang="en-US" sz="1100" dirty="0"/>
           </a:p>
@@ -8276,12 +8237,12 @@
         </p:nvSpPr>
         <p:spPr>
           <a:xfrm>
-            <a:off x="621792" y="5394960"/>
-            <a:ext cx="10948111" cy="841248"/>
+            <a:off x="621792" y="5431536"/>
+            <a:ext cx="10948111" cy="713232"/>
           </a:xfrm>
           <a:prstGeom prst="roundRect">
             <a:avLst>
-              <a:gd name="adj" fmla="val 17391"/>
+              <a:gd name="adj" fmla="val 20513"/>
             </a:avLst>
           </a:prstGeom>
           <a:solidFill>
@@ -8298,8 +8259,8 @@
         </p:nvSpPr>
         <p:spPr>
           <a:xfrm>
-            <a:off x="621792" y="5449824"/>
-            <a:ext cx="50292" cy="731520"/>
+            <a:off x="621792" y="5486400"/>
+            <a:ext cx="50292" cy="603504"/>
           </a:xfrm>
           <a:prstGeom prst="rect">
             <a:avLst/>
@@ -8318,17 +8279,17 @@
         </p:nvSpPr>
         <p:spPr>
           <a:xfrm>
-            <a:off x="896112" y="5559552"/>
-            <a:ext cx="10399471" cy="274320"/>
-          </a:xfrm>
-          <a:prstGeom prst="rect">
-            <a:avLst/>
-          </a:prstGeom>
-          <a:noFill/>
-          <a:ln/>
-        </p:spPr>
-        <p:txBody>
-          <a:bodyPr wrap="square" lIns="0" tIns="0" rIns="0" bIns="0" rtlCol="0" anchor="t"/>
+            <a:off x="896112" y="5522976"/>
+            <a:ext cx="10399471" cy="530352"/>
+          </a:xfrm>
+          <a:prstGeom prst="rect">
+            <a:avLst/>
+          </a:prstGeom>
+          <a:noFill/>
+          <a:ln/>
+        </p:spPr>
+        <p:txBody>
+          <a:bodyPr wrap="square" lIns="0" tIns="0" rIns="0" bIns="0" rtlCol="0" anchor="ctr"/>
           <a:lstStyle/>
           <a:p>
             <a:pPr indent="0" marL="0">
@@ -8349,45 +8310,6 @@
               <a:t>Keputusan yang baik bukan yang menemukan teori paling sahih, melainkan yang menyadari seluruh spektrum pertimbangan.</a:t>
             </a:r>
             <a:endParaRPr lang="en-US" sz="1250" dirty="0"/>
-          </a:p>
-        </p:txBody>
-      </p:sp>
-      <p:sp>
-        <p:nvSpPr>
-          <p:cNvPr id="27" name="Text 25"/>
-          <p:cNvSpPr txBox="1"/>
-          <p:nvPr/>
-        </p:nvSpPr>
-        <p:spPr>
-          <a:xfrm>
-            <a:off x="896112" y="5852160"/>
-            <a:ext cx="10399471" cy="237744"/>
-          </a:xfrm>
-          <a:prstGeom prst="rect">
-            <a:avLst/>
-          </a:prstGeom>
-          <a:noFill/>
-          <a:ln/>
-        </p:spPr>
-        <p:txBody>
-          <a:bodyPr wrap="square" lIns="0" tIns="0" rIns="0" bIns="0" rtlCol="0" anchor="t"/>
-          <a:lstStyle/>
-          <a:p>
-            <a:pPr indent="0" marL="0">
-              <a:buNone/>
-            </a:pPr>
-            <a:r>
-              <a:rPr lang="en-US" sz="950" b="1" spc="100" kern="0" dirty="0">
-                <a:solidFill>
-                  <a:srgbClr val="6B7A90"/>
-                </a:solidFill>
-                <a:latin typeface="Calibri" pitchFamily="34" charset="0"/>
-                <a:ea typeface="Calibri" pitchFamily="34" charset="-122"/>
-                <a:cs typeface="Calibri" pitchFamily="34" charset="-120"/>
-              </a:rPr>
-              <a:t>PESAN UTAMA FIGURE 3.2 · CRANE ET AL. (2019)</a:t>
-            </a:r>
-            <a:endParaRPr lang="en-US" sz="950" dirty="0"/>
           </a:p>
         </p:txBody>
       </p:sp>
@@ -9896,7 +9818,7 @@
                 <a:ea typeface="Calibri" pitchFamily="34" charset="-122"/>
                 <a:cs typeface="Calibri" pitchFamily="34" charset="-120"/>
               </a:rPr>
-              <a:t>Crane, Matten, Glozer &amp; Spence (2019) · Case 3, halaman 129–134</a:t>
+              <a:t>MBA · Universitas Gadjah Mada</a:t>
             </a:r>
             <a:endParaRPr lang="en-US" sz="1050" dirty="0"/>
           </a:p>
@@ -11813,7 +11735,7 @@
         <p:spPr>
           <a:xfrm>
             <a:off x="1613002" y="457200"/>
-            <a:ext cx="1234440" cy="283464"/>
+            <a:ext cx="1868119" cy="283464"/>
           </a:xfrm>
           <a:prstGeom prst="roundRect">
             <a:avLst>
@@ -11840,7 +11762,7 @@
         <p:spPr>
           <a:xfrm>
             <a:off x="1613002" y="457200"/>
-            <a:ext cx="1234440" cy="283464"/>
+            <a:ext cx="1868119" cy="283464"/>
           </a:xfrm>
           <a:prstGeom prst="rect">
             <a:avLst/>
@@ -11864,7 +11786,7 @@
                 <a:ea typeface="Calibri" pitchFamily="34" charset="-122"/>
                 <a:cs typeface="Calibri" pitchFamily="34" charset="-120"/>
               </a:rPr>
-              <a:t>FIGURE 3.2</a:t>
+              <a:t>PENDEKATAN PRISMA</a:t>
             </a:r>
             <a:endParaRPr lang="en-US" sz="950" dirty="0"/>
           </a:p>
@@ -12927,7 +12849,7 @@
                 <a:ea typeface="Calibri" pitchFamily="34" charset="-122"/>
                 <a:cs typeface="Calibri" pitchFamily="34" charset="-120"/>
               </a:rPr>
-              <a:t>Sembilan penilaian atas satu rangkaian fakta yang identik. Inilah prisma pada Figure 3.2.</a:t>
+              <a:t>Sembilan penilaian atas satu rangkaian fakta yang identik. Inilah pendekatan prisma.</a:t>
             </a:r>
             <a:endParaRPr lang="en-US" sz="1150" dirty="0"/>
           </a:p>
@@ -13111,7 +13033,7 @@
                 <a:ea typeface="Calibri" pitchFamily="34" charset="-122"/>
                 <a:cs typeface="Calibri" pitchFamily="34" charset="-120"/>
               </a:rPr>
-              <a:t>HALAMAN 129–130</a:t>
+              <a:t>PROFIL INDUSTRI</a:t>
             </a:r>
             <a:endParaRPr lang="en-US" sz="950" dirty="0"/>
           </a:p>
@@ -15751,7 +15673,7 @@
         <p:spPr>
           <a:xfrm>
             <a:off x="1522476" y="457200"/>
-            <a:ext cx="1687068" cy="283464"/>
+            <a:ext cx="1777594" cy="283464"/>
           </a:xfrm>
           <a:prstGeom prst="roundRect">
             <a:avLst>
@@ -15778,7 +15700,7 @@
         <p:spPr>
           <a:xfrm>
             <a:off x="1522476" y="457200"/>
-            <a:ext cx="1687068" cy="283464"/>
+            <a:ext cx="1777594" cy="283464"/>
           </a:xfrm>
           <a:prstGeom prst="rect">
             <a:avLst/>
@@ -15802,7 +15724,7 @@
                 <a:ea typeface="Calibri" pitchFamily="34" charset="-122"/>
                 <a:cs typeface="Calibri" pitchFamily="34" charset="-120"/>
               </a:rPr>
-              <a:t>HALAMAN 131–133</a:t>
+              <a:t>KLAIM BERHADAPAN</a:t>
             </a:r>
             <a:endParaRPr lang="en-US" sz="950" dirty="0"/>
           </a:p>
